--- a/assets/pptx/catalog-403.pptx
+++ b/assets/pptx/catalog-403.pptx
@@ -4053,7 +4053,7 @@
                 <a:ea typeface="Ebrima"/>
                 <a:cs typeface="Ebrima"/>
               </a:rPr>
-              <a:t>ልዑል ሆይ ተባረክ (2x)</a:t>
+              <a:t>ልዑል ሆይ ተባረክ 2x</a:t>
             </a:r>
           </a:p>
         </p:txBody>
@@ -4313,7 +4313,7 @@
                 <a:ea typeface="Ebrima"/>
                 <a:cs typeface="Ebrima"/>
               </a:rPr>
-              <a:t>በአንተ ፊት ማንስ መቆም ይችላል (2x)</a:t>
+              <a:t>በአንተ ፊት ማንስ መቆም ይችላል 2x</a:t>
             </a:r>
           </a:p>
         </p:txBody>
@@ -4537,7 +4537,7 @@
                 <a:ea typeface="Ebrima"/>
                 <a:cs typeface="Ebrima"/>
               </a:rPr>
-              <a:t>ልዑል ሆይ ማደሪያህ ይባረክ (4x)</a:t>
+              <a:t>ልዑል ሆይ ማደሪያህ ይባረክ 4x</a:t>
             </a:r>
           </a:p>
         </p:txBody>
